--- a/ppt/FORGE_AI_25_CN.pptx
+++ b/ppt/FORGE_AI_25_CN.pptx
@@ -3030,6 +3030,10 @@
           </a:solidFill>
           <a:ln/>
         </p:spPr>
+        <p:txBody>
+          <a:bodyPr/>
+          <a:p/>
+        </p:txBody>
       </p:sp>
       <p:sp>
         <p:nvSpPr>
@@ -3095,6 +3099,10 @@
             <a:prstDash val="solid"/>
           </a:ln>
         </p:spPr>
+        <p:txBody>
+          <a:bodyPr/>
+          <a:p/>
+        </p:txBody>
       </p:sp>
       <p:sp>
         <p:nvSpPr>
@@ -3196,6 +3204,10 @@
             <a:prstDash val="solid"/>
           </a:ln>
         </p:spPr>
+        <p:txBody>
+          <a:bodyPr/>
+          <a:p/>
+        </p:txBody>
       </p:sp>
     </p:spTree>
   </p:cSld>
